--- a/Презентация_ВКР_КУПИШУЗ.pptx
+++ b/Презентация_ВКР_КУПИШУЗ.pptx
@@ -6389,7 +6389,7 @@
         <p:spPr>
           <a:xfrm>
             <a:off x="144000" y="1440000"/>
-            <a:ext cx="8856000" cy="3119252"/>
+            <a:ext cx="8856000" cy="3222720"/>
           </a:xfrm>
           <a:prstGeom prst="rect">
             <a:avLst/>
